--- a/fixtures/sample-editor-animations.pptx
+++ b/fixtures/sample-editor-animations.pptx
@@ -9,6 +9,7 @@
     <p:sldId id="257" r:id="rId3"/>
     <p:sldId id="258" r:id="rId4"/>
     <p:sldId id="259" r:id="rId5"/>
+    <p:sldId id="260" r:id="rId6"/>
   </p:sldIdLst>
   <p:sldSz cx="12192000" cy="6858000"/>
   <p:notesSz cx="6858000" cy="9144000"/>
@@ -192,112 +193,17 @@
   </p:clrMapOvr>
   <mc:AlternateContent>
     <mc:Choice Requires="p14">
-      <p:timing xmlns:fixture="urn:web-ppt:animation-fixture" fixture:keep="timing">
+      <p:timing>
         <p:tnLst>
-          <p:par>
-            <p:cTn id="1" dur="indefinite" restart="never" nodeType="tmRoot">
-              <p:childTnLst>
-                <p:seq concurrent="1" nextAc="seek">
-                  <p:cTn id="2" dur="indefinite" nodeType="mainSeq">
-                    <p:childTnLst>
-                      <p:par>
-                        <p:cTn id="10" presetID="2" presetClass="entr" fill="hold" nodeType="clickEffect">
-                          <p:stCondLst>
-                            <p:cond delay="0"/>
-                          </p:stCondLst>
-                          <p:childTnLst>
-                            <p:set>
-                              <p:cBhvr>
-                                <p:cTn id="11" dur="1" fill="hold"/>
-                                <p:tgtEl>
-                                  <p:spTgt spid="101"/>
-                                </p:tgtEl>
-                                <p:attrNameLst>
-                                  <p:attrName>style.visibility</p:attrName>
-                                </p:attrNameLst>
-                              </p:cBhvr>
-                              <p:to>
-                                <p:strVal val="visible"/>
-                              </p:to>
-                            </p:set>
-                            <p:animEffect transition="in" filter="slide(fromLeft)">
-                              <p:cBhvr>
-                                <p:cTn id="12" dur="600" fill="hold"/>
-                                <p:tgtEl>
-                                  <p:spTgt spid="101"/>
-                                </p:tgtEl>
-                              </p:cBhvr>
-                            </p:animEffect>
-                          </p:childTnLst>
-                        </p:cTn>
-                      </p:par>
-                      <p:par>
-                        <p:cTn id="20" presetID="61" presetClass="emph" fill="hold" nodeType="withEffect">
-                          <p:stCondLst>
-                            <p:cond delay="120"/>
-                          </p:stCondLst>
-                          <p:childTnLst>
-                            <p:animRot by="21600000">
-                              <p:cBhvr>
-                                <p:cTn id="21" dur="900" fill="hold"/>
-                                <p:tgtEl>
-                                  <p:spTgt spid="102"/>
-                                </p:tgtEl>
-                                <p:attrNameLst>
-                                  <p:attrName>r</p:attrName>
-                                </p:attrNameLst>
-                              </p:cBhvr>
-                            </p:animRot>
-                          </p:childTnLst>
-                        </p:cTn>
-                      </p:par>
-                      <p:par>
-                        <p:cTn id="30" presetID="0" presetClass="path" fill="hold" nodeType="afterEffect">
-                          <p:stCondLst>
-                            <p:cond delay="80"/>
-                          </p:stCondLst>
-                          <p:childTnLst>
-                            <p:animMotion origin="layout" path="M 0 0 L 0.18 -0.12 L 0.3 0.06 E" pathEditMode="relative">
-                              <p:cBhvr>
-                                <p:cTn id="31" dur="1000" fill="hold"/>
-                                <p:tgtEl>
-                                  <p:spTgt spid="101"/>
-                                </p:tgtEl>
-                                <p:attrNameLst>
-                                  <p:attrName>ppt_x</p:attrName>
-                                  <p:attrName>ppt_y</p:attrName>
-                                </p:attrNameLst>
-                              </p:cBhvr>
-                            </p:animMotion>
-                          </p:childTnLst>
-                        </p:cTn>
-                      </p:par>
-                      <p:animClr clrSpc="rgb">
-                        <p:cBhvr>
-                          <p:cTn id="40" dur="500" fill="hold"/>
-                          <p:tgtEl>
-                            <p:spTgt spid="102"/>
-                          </p:tgtEl>
-                        </p:cBhvr>
-                        <p:to>
-                          <a:srgbClr val="FF0000"/>
-                        </p:to>
-                      </p:animClr>
-                    </p:childTnLst>
-                  </p:cTn>
-                </p:seq>
-              </p:childTnLst>
-            </p:cTn>
-          </p:par>
+          <p14:anim presetID="999">
+            <p:cBhvr>
+              <p:cTn id="91" dur="700"/>
+              <p:tgtEl>
+                <p:spTgt spid="102"/>
+              </p:tgtEl>
+            </p:cBhvr>
+          </p14:anim>
         </p:tnLst>
-        <p:bldLst fixture:keepBuild="yes">
-          <p:bldP spid="101" grpId="0" build="p"/>
-        </p:bldLst>
-        <p:extLst>
-          <p:ext uri="{ANIMATION-KEEP}">
-            <fixture:payload value="keep"/>
-          </p:ext>
-        </p:extLst>
       </p:timing>
     </mc:Choice>
     <mc:Fallback>
@@ -2173,6 +2079,111 @@
 </p:sld>
 </file>
 
+<file path=ppt/slides/slide5.xml><?xml version="1.0" encoding="utf-8"?>
+<p:sld xmlns:a="http://schemas.openxmlformats.org/drawingml/2006/main" xmlns:r="http://schemas.openxmlformats.org/officeDocument/2006/relationships" xmlns:p="http://schemas.openxmlformats.org/presentationml/2006/main">
+  <p:cSld>
+    <p:spTree>
+      <p:nvGrpSpPr>
+        <p:cNvPr id="1" name=""/>
+        <p:cNvGrpSpPr/>
+        <p:nvPr/>
+      </p:nvGrpSpPr>
+      <p:grpSpPr>
+        <a:xfrm>
+          <a:off x="0" y="0"/>
+          <a:ext cx="0" cy="0"/>
+          <a:chOff x="0" y="0"/>
+          <a:chExt cx="0" cy="0"/>
+        </a:xfrm>
+      </p:grpSpPr>
+      <p:sp>
+        <p:nvSpPr>
+          <p:cNvPr id="166" name="noncanonical-spin"/>
+          <p:cNvSpPr/>
+          <p:nvPr/>
+        </p:nvSpPr>
+        <p:spPr>
+          <a:xfrm>
+            <a:off x="3429000" y="2476500"/>
+            <a:ext cx="4000500" cy="1428750"/>
+          </a:xfrm>
+          <a:prstGeom prst="roundRect">
+            <a:avLst/>
+          </a:prstGeom>
+          <a:solidFill>
+            <a:srgbClr val="4472C4"/>
+          </a:solidFill>
+        </p:spPr>
+        <p:txBody>
+          <a:bodyPr anchor="ctr"/>
+          <a:lstStyle/>
+          <a:p>
+            <a:pPr algn="ctr"/>
+            <a:r>
+              <a:rPr sz="2800">
+                <a:solidFill>
+                  <a:srgbClr val="FFFFFF"/>
+                </a:solidFill>
+              </a:rPr>
+              <a:t>非规范可识别时间树</a:t>
+            </a:r>
+          </a:p>
+        </p:txBody>
+      </p:sp>
+    </p:spTree>
+  </p:cSld>
+  <p:clrMapOvr>
+    <a:masterClrMapping/>
+  </p:clrMapOvr>
+  <p:timing>
+    <p:tnLst>
+      <p:par>
+        <p:cTn id="92" dur="indefinite" restart="never" nodeType="tmRoot">
+          <p:childTnLst>
+            <p:seq concurrent="1" nextAc="seek">
+              <p:cTn id="93" dur="indefinite" nodeType="mainSeq">
+                <p:childTnLst>
+                  <p:par>
+                    <p:cTn id="94" fill="hold" nodeType="clickEffect">
+                      <p:stCondLst>
+                        <p:cond delay="indefinite"/>
+                      </p:stCondLst>
+                      <p:childTnLst>
+                        <p:par>
+                          <p:cTn id="100" presetID="61" presetClass="emph" dur="900" fill="hold" nodeType="clickEffect">
+                            <p:stCondLst>
+                              <p:cond delay="120"/>
+                              <p:cond delay="240"/>
+                            </p:stCondLst>
+                            <p:childTnLst>
+                              <p:animRot by="10800000">
+                                <p:cBhvr>
+                                  <p:cTn id="101" dur="900" fill="hold"/>
+                                  <p:tgtEl>
+                                    <p:spTgt spid="166"/>
+                                  </p:tgtEl>
+                                  <p:attrNameLst>
+                                    <p:attrName>r</p:attrName>
+                                  </p:attrNameLst>
+                                </p:cBhvr>
+                              </p:animRot>
+                            </p:childTnLst>
+                          </p:cTn>
+                        </p:par>
+                      </p:childTnLst>
+                    </p:cTn>
+                  </p:par>
+                </p:childTnLst>
+              </p:cTn>
+            </p:seq>
+          </p:childTnLst>
+        </p:cTn>
+      </p:par>
+    </p:tnLst>
+  </p:timing>
+</p:sld>
+</file>
+
 <file path=ppt/theme/theme1.xml><?xml version="1.0" encoding="utf-8"?>
 <a:theme xmlns:a="http://schemas.openxmlformats.org/drawingml/2006/main" name="Editor Animations">
   <a:themeElements>

--- a/fixtures/sample-editor-animations.pptx
+++ b/fixtures/sample-editor-animations.pptx
@@ -186,6 +186,55 @@
           </a:p>
         </p:txBody>
       </p:sp>
+      <p:grpSp>
+        <p:nvGrpSpPr>
+          <p:cNvPr id="103" name="source-group"/>
+          <p:cNvGrpSpPr/>
+          <p:nvPr/>
+        </p:nvGrpSpPr>
+        <p:grpSpPr>
+          <a:xfrm>
+            <a:off x="9239250" y="857250"/>
+            <a:ext cx="2190750" cy="857250"/>
+            <a:chOff x="0" y="0"/>
+            <a:chExt cx="4000500" cy="1428750"/>
+          </a:xfrm>
+        </p:grpSpPr>
+        <p:sp>
+          <p:nvSpPr>
+            <p:cNvPr id="104" name="source-group-child"/>
+            <p:cNvSpPr/>
+            <p:nvPr/>
+          </p:nvSpPr>
+          <p:spPr>
+            <a:xfrm>
+              <a:off x="0" y="0"/>
+              <a:ext cx="4000500" cy="1428750"/>
+            </a:xfrm>
+            <a:prstGeom prst="roundRect">
+              <a:avLst/>
+            </a:prstGeom>
+            <a:solidFill>
+              <a:srgbClr val="5B9BD5"/>
+            </a:solidFill>
+          </p:spPr>
+          <p:txBody>
+            <a:bodyPr anchor="ctr"/>
+            <a:lstStyle/>
+            <a:p>
+              <a:pPr algn="ctr"/>
+              <a:r>
+                <a:rPr sz="2800">
+                  <a:solidFill>
+                    <a:srgbClr val="FFFFFF"/>
+                  </a:solidFill>
+                </a:rPr>
+                <a:t>组内未支持动画</a:t>
+              </a:r>
+            </a:p>
+          </p:txBody>
+        </p:sp>
+      </p:grpSp>
     </p:spTree>
   </p:cSld>
   <p:clrMapOvr>
@@ -287,17 +336,41 @@
                           </p:childTnLst>
                         </p:cTn>
                       </p:par>
-                      <p:animClr clrSpc="rgb">
-                        <p:cBhvr>
-                          <p:cTn id="40" dur="500" fill="hold"/>
+                      <p14:anim fixture:multiTarget="yes">
+                        <p:cBhvr fixture:dropTarget="yes">
+                          <p:cTn id="41" dur="500" fill="hold"/>
+                          <p:tgtEl>
+                            <p:spTgt spid="104"/>
+                          </p:tgtEl>
+                        </p:cBhvr>
+                        <p:cBhvr fixture:keepTarget="yes">
+                          <p:cTn id="42" dur="500" fill="hold"/>
                           <p:tgtEl>
                             <p:spTgt spid="102"/>
                           </p:tgtEl>
                         </p:cBhvr>
-                        <p:to>
-                          <a:srgbClr val="FF0000"/>
-                        </p:to>
-                      </p:animClr>
+                      </p14:anim>
+                      <p:par fixture:triggerOwner="yes">
+                        <p:cTn id="50" dur="indefinite">
+                          <p:stCondLst>
+                            <p:cond delay="0" evt="onClick">
+                              <p:tgtEl>
+                                <p:spTgt spid="104"/>
+                              </p:tgtEl>
+                            </p:cond>
+                          </p:stCondLst>
+                          <p:childTnLst>
+                            <p:cmd type="call" cmd="fixture:keep">
+                              <p:cBhvr>
+                                <p:cTn id="51" dur="1"/>
+                                <p:tgtEl>
+                                  <p:spTgt spid="102"/>
+                                </p:tgtEl>
+                              </p:cBhvr>
+                            </p:cmd>
+                          </p:childTnLst>
+                        </p:cTn>
+                      </p:par>
                     </p:childTnLst>
                   </p:cTn>
                 </p:seq>
@@ -346,7 +419,7 @@
       </p:grpSpPr>
       <p:sp>
         <p:nvSpPr>
-          <p:cNvPr id="103" name="plain-a"/>
+          <p:cNvPr id="105" name="plain-a"/>
           <p:cNvSpPr/>
           <p:nvPr/>
         </p:nvSpPr>
@@ -380,7 +453,7 @@
       </p:sp>
       <p:sp>
         <p:nvSpPr>
-          <p:cNvPr id="104" name="plain-b"/>
+          <p:cNvPr id="106" name="plain-b"/>
           <p:cNvSpPr/>
           <p:nvPr/>
         </p:nvSpPr>
@@ -439,7 +512,7 @@
       </p:grpSpPr>
       <p:sp>
         <p:nvSpPr>
-          <p:cNvPr id="105" name="perf-0"/>
+          <p:cNvPr id="107" name="perf-0"/>
           <p:cNvSpPr/>
           <p:nvPr/>
         </p:nvSpPr>
@@ -465,7 +538,7 @@
       </p:sp>
       <p:sp>
         <p:nvSpPr>
-          <p:cNvPr id="106" name="perf-1"/>
+          <p:cNvPr id="108" name="perf-1"/>
           <p:cNvSpPr/>
           <p:nvPr/>
         </p:nvSpPr>
@@ -491,7 +564,7 @@
       </p:sp>
       <p:sp>
         <p:nvSpPr>
-          <p:cNvPr id="107" name="perf-2"/>
+          <p:cNvPr id="109" name="perf-2"/>
           <p:cNvSpPr/>
           <p:nvPr/>
         </p:nvSpPr>
@@ -517,7 +590,7 @@
       </p:sp>
       <p:sp>
         <p:nvSpPr>
-          <p:cNvPr id="108" name="perf-3"/>
+          <p:cNvPr id="110" name="perf-3"/>
           <p:cNvSpPr/>
           <p:nvPr/>
         </p:nvSpPr>
@@ -543,7 +616,7 @@
       </p:sp>
       <p:sp>
         <p:nvSpPr>
-          <p:cNvPr id="109" name="perf-4"/>
+          <p:cNvPr id="111" name="perf-4"/>
           <p:cNvSpPr/>
           <p:nvPr/>
         </p:nvSpPr>
@@ -569,7 +642,7 @@
       </p:sp>
       <p:sp>
         <p:nvSpPr>
-          <p:cNvPr id="110" name="perf-5"/>
+          <p:cNvPr id="112" name="perf-5"/>
           <p:cNvSpPr/>
           <p:nvPr/>
         </p:nvSpPr>
@@ -595,7 +668,7 @@
       </p:sp>
       <p:sp>
         <p:nvSpPr>
-          <p:cNvPr id="111" name="perf-6"/>
+          <p:cNvPr id="113" name="perf-6"/>
           <p:cNvSpPr/>
           <p:nvPr/>
         </p:nvSpPr>
@@ -621,7 +694,7 @@
       </p:sp>
       <p:sp>
         <p:nvSpPr>
-          <p:cNvPr id="112" name="perf-7"/>
+          <p:cNvPr id="114" name="perf-7"/>
           <p:cNvSpPr/>
           <p:nvPr/>
         </p:nvSpPr>
@@ -647,7 +720,7 @@
       </p:sp>
       <p:sp>
         <p:nvSpPr>
-          <p:cNvPr id="113" name="perf-8"/>
+          <p:cNvPr id="115" name="perf-8"/>
           <p:cNvSpPr/>
           <p:nvPr/>
         </p:nvSpPr>
@@ -673,7 +746,7 @@
       </p:sp>
       <p:sp>
         <p:nvSpPr>
-          <p:cNvPr id="114" name="perf-9"/>
+          <p:cNvPr id="116" name="perf-9"/>
           <p:cNvSpPr/>
           <p:nvPr/>
         </p:nvSpPr>
@@ -699,7 +772,7 @@
       </p:sp>
       <p:sp>
         <p:nvSpPr>
-          <p:cNvPr id="115" name="perf-10"/>
+          <p:cNvPr id="117" name="perf-10"/>
           <p:cNvSpPr/>
           <p:nvPr/>
         </p:nvSpPr>
@@ -725,7 +798,7 @@
       </p:sp>
       <p:sp>
         <p:nvSpPr>
-          <p:cNvPr id="116" name="perf-11"/>
+          <p:cNvPr id="118" name="perf-11"/>
           <p:cNvSpPr/>
           <p:nvPr/>
         </p:nvSpPr>
@@ -751,7 +824,7 @@
       </p:sp>
       <p:sp>
         <p:nvSpPr>
-          <p:cNvPr id="117" name="perf-12"/>
+          <p:cNvPr id="119" name="perf-12"/>
           <p:cNvSpPr/>
           <p:nvPr/>
         </p:nvSpPr>
@@ -777,7 +850,7 @@
       </p:sp>
       <p:sp>
         <p:nvSpPr>
-          <p:cNvPr id="118" name="perf-13"/>
+          <p:cNvPr id="120" name="perf-13"/>
           <p:cNvSpPr/>
           <p:nvPr/>
         </p:nvSpPr>
@@ -803,7 +876,7 @@
       </p:sp>
       <p:sp>
         <p:nvSpPr>
-          <p:cNvPr id="119" name="perf-14"/>
+          <p:cNvPr id="121" name="perf-14"/>
           <p:cNvSpPr/>
           <p:nvPr/>
         </p:nvSpPr>
@@ -829,7 +902,7 @@
       </p:sp>
       <p:sp>
         <p:nvSpPr>
-          <p:cNvPr id="120" name="perf-15"/>
+          <p:cNvPr id="122" name="perf-15"/>
           <p:cNvSpPr/>
           <p:nvPr/>
         </p:nvSpPr>
@@ -855,7 +928,7 @@
       </p:sp>
       <p:sp>
         <p:nvSpPr>
-          <p:cNvPr id="121" name="perf-16"/>
+          <p:cNvPr id="123" name="perf-16"/>
           <p:cNvSpPr/>
           <p:nvPr/>
         </p:nvSpPr>
@@ -881,7 +954,7 @@
       </p:sp>
       <p:sp>
         <p:nvSpPr>
-          <p:cNvPr id="122" name="perf-17"/>
+          <p:cNvPr id="124" name="perf-17"/>
           <p:cNvSpPr/>
           <p:nvPr/>
         </p:nvSpPr>
@@ -907,7 +980,7 @@
       </p:sp>
       <p:sp>
         <p:nvSpPr>
-          <p:cNvPr id="123" name="perf-18"/>
+          <p:cNvPr id="125" name="perf-18"/>
           <p:cNvSpPr/>
           <p:nvPr/>
         </p:nvSpPr>
@@ -933,7 +1006,7 @@
       </p:sp>
       <p:sp>
         <p:nvSpPr>
-          <p:cNvPr id="124" name="perf-19"/>
+          <p:cNvPr id="126" name="perf-19"/>
           <p:cNvSpPr/>
           <p:nvPr/>
         </p:nvSpPr>
@@ -959,7 +1032,7 @@
       </p:sp>
       <p:sp>
         <p:nvSpPr>
-          <p:cNvPr id="125" name="perf-20"/>
+          <p:cNvPr id="127" name="perf-20"/>
           <p:cNvSpPr/>
           <p:nvPr/>
         </p:nvSpPr>
@@ -985,7 +1058,7 @@
       </p:sp>
       <p:sp>
         <p:nvSpPr>
-          <p:cNvPr id="126" name="perf-21"/>
+          <p:cNvPr id="128" name="perf-21"/>
           <p:cNvSpPr/>
           <p:nvPr/>
         </p:nvSpPr>
@@ -1011,7 +1084,7 @@
       </p:sp>
       <p:sp>
         <p:nvSpPr>
-          <p:cNvPr id="127" name="perf-22"/>
+          <p:cNvPr id="129" name="perf-22"/>
           <p:cNvSpPr/>
           <p:nvPr/>
         </p:nvSpPr>
@@ -1037,7 +1110,7 @@
       </p:sp>
       <p:sp>
         <p:nvSpPr>
-          <p:cNvPr id="128" name="perf-23"/>
+          <p:cNvPr id="130" name="perf-23"/>
           <p:cNvSpPr/>
           <p:nvPr/>
         </p:nvSpPr>
@@ -1063,7 +1136,7 @@
       </p:sp>
       <p:sp>
         <p:nvSpPr>
-          <p:cNvPr id="129" name="perf-24"/>
+          <p:cNvPr id="131" name="perf-24"/>
           <p:cNvSpPr/>
           <p:nvPr/>
         </p:nvSpPr>
@@ -1089,7 +1162,7 @@
       </p:sp>
       <p:sp>
         <p:nvSpPr>
-          <p:cNvPr id="130" name="perf-25"/>
+          <p:cNvPr id="132" name="perf-25"/>
           <p:cNvSpPr/>
           <p:nvPr/>
         </p:nvSpPr>
@@ -1115,7 +1188,7 @@
       </p:sp>
       <p:sp>
         <p:nvSpPr>
-          <p:cNvPr id="131" name="perf-26"/>
+          <p:cNvPr id="133" name="perf-26"/>
           <p:cNvSpPr/>
           <p:nvPr/>
         </p:nvSpPr>
@@ -1141,7 +1214,7 @@
       </p:sp>
       <p:sp>
         <p:nvSpPr>
-          <p:cNvPr id="132" name="perf-27"/>
+          <p:cNvPr id="134" name="perf-27"/>
           <p:cNvSpPr/>
           <p:nvPr/>
         </p:nvSpPr>
@@ -1167,7 +1240,7 @@
       </p:sp>
       <p:sp>
         <p:nvSpPr>
-          <p:cNvPr id="133" name="perf-28"/>
+          <p:cNvPr id="135" name="perf-28"/>
           <p:cNvSpPr/>
           <p:nvPr/>
         </p:nvSpPr>
@@ -1193,7 +1266,7 @@
       </p:sp>
       <p:sp>
         <p:nvSpPr>
-          <p:cNvPr id="134" name="perf-29"/>
+          <p:cNvPr id="136" name="perf-29"/>
           <p:cNvSpPr/>
           <p:nvPr/>
         </p:nvSpPr>
@@ -1219,7 +1292,7 @@
       </p:sp>
       <p:sp>
         <p:nvSpPr>
-          <p:cNvPr id="135" name="perf-30"/>
+          <p:cNvPr id="137" name="perf-30"/>
           <p:cNvSpPr/>
           <p:nvPr/>
         </p:nvSpPr>
@@ -1245,7 +1318,7 @@
       </p:sp>
       <p:sp>
         <p:nvSpPr>
-          <p:cNvPr id="136" name="perf-31"/>
+          <p:cNvPr id="138" name="perf-31"/>
           <p:cNvSpPr/>
           <p:nvPr/>
         </p:nvSpPr>
@@ -1271,7 +1344,7 @@
       </p:sp>
       <p:sp>
         <p:nvSpPr>
-          <p:cNvPr id="137" name="perf-32"/>
+          <p:cNvPr id="139" name="perf-32"/>
           <p:cNvSpPr/>
           <p:nvPr/>
         </p:nvSpPr>
@@ -1297,7 +1370,7 @@
       </p:sp>
       <p:sp>
         <p:nvSpPr>
-          <p:cNvPr id="138" name="perf-33"/>
+          <p:cNvPr id="140" name="perf-33"/>
           <p:cNvSpPr/>
           <p:nvPr/>
         </p:nvSpPr>
@@ -1323,7 +1396,7 @@
       </p:sp>
       <p:sp>
         <p:nvSpPr>
-          <p:cNvPr id="139" name="perf-34"/>
+          <p:cNvPr id="141" name="perf-34"/>
           <p:cNvSpPr/>
           <p:nvPr/>
         </p:nvSpPr>
@@ -1349,7 +1422,7 @@
       </p:sp>
       <p:sp>
         <p:nvSpPr>
-          <p:cNvPr id="140" name="perf-35"/>
+          <p:cNvPr id="142" name="perf-35"/>
           <p:cNvSpPr/>
           <p:nvPr/>
         </p:nvSpPr>
@@ -1375,7 +1448,7 @@
       </p:sp>
       <p:sp>
         <p:nvSpPr>
-          <p:cNvPr id="141" name="perf-36"/>
+          <p:cNvPr id="143" name="perf-36"/>
           <p:cNvSpPr/>
           <p:nvPr/>
         </p:nvSpPr>
@@ -1401,7 +1474,7 @@
       </p:sp>
       <p:sp>
         <p:nvSpPr>
-          <p:cNvPr id="142" name="perf-37"/>
+          <p:cNvPr id="144" name="perf-37"/>
           <p:cNvSpPr/>
           <p:nvPr/>
         </p:nvSpPr>
@@ -1427,7 +1500,7 @@
       </p:sp>
       <p:sp>
         <p:nvSpPr>
-          <p:cNvPr id="143" name="perf-38"/>
+          <p:cNvPr id="145" name="perf-38"/>
           <p:cNvSpPr/>
           <p:nvPr/>
         </p:nvSpPr>
@@ -1453,7 +1526,7 @@
       </p:sp>
       <p:sp>
         <p:nvSpPr>
-          <p:cNvPr id="144" name="perf-39"/>
+          <p:cNvPr id="146" name="perf-39"/>
           <p:cNvSpPr/>
           <p:nvPr/>
         </p:nvSpPr>
@@ -1479,7 +1552,7 @@
       </p:sp>
       <p:sp>
         <p:nvSpPr>
-          <p:cNvPr id="145" name="perf-40"/>
+          <p:cNvPr id="147" name="perf-40"/>
           <p:cNvSpPr/>
           <p:nvPr/>
         </p:nvSpPr>
@@ -1505,7 +1578,7 @@
       </p:sp>
       <p:sp>
         <p:nvSpPr>
-          <p:cNvPr id="146" name="perf-41"/>
+          <p:cNvPr id="148" name="perf-41"/>
           <p:cNvSpPr/>
           <p:nvPr/>
         </p:nvSpPr>
@@ -1531,7 +1604,7 @@
       </p:sp>
       <p:sp>
         <p:nvSpPr>
-          <p:cNvPr id="147" name="perf-42"/>
+          <p:cNvPr id="149" name="perf-42"/>
           <p:cNvSpPr/>
           <p:nvPr/>
         </p:nvSpPr>
@@ -1557,7 +1630,7 @@
       </p:sp>
       <p:sp>
         <p:nvSpPr>
-          <p:cNvPr id="148" name="perf-43"/>
+          <p:cNvPr id="150" name="perf-43"/>
           <p:cNvSpPr/>
           <p:nvPr/>
         </p:nvSpPr>
@@ -1583,7 +1656,7 @@
       </p:sp>
       <p:sp>
         <p:nvSpPr>
-          <p:cNvPr id="149" name="perf-44"/>
+          <p:cNvPr id="151" name="perf-44"/>
           <p:cNvSpPr/>
           <p:nvPr/>
         </p:nvSpPr>
@@ -1609,7 +1682,7 @@
       </p:sp>
       <p:sp>
         <p:nvSpPr>
-          <p:cNvPr id="150" name="perf-45"/>
+          <p:cNvPr id="152" name="perf-45"/>
           <p:cNvSpPr/>
           <p:nvPr/>
         </p:nvSpPr>
@@ -1635,7 +1708,7 @@
       </p:sp>
       <p:sp>
         <p:nvSpPr>
-          <p:cNvPr id="151" name="perf-46"/>
+          <p:cNvPr id="153" name="perf-46"/>
           <p:cNvSpPr/>
           <p:nvPr/>
         </p:nvSpPr>
@@ -1661,7 +1734,7 @@
       </p:sp>
       <p:sp>
         <p:nvSpPr>
-          <p:cNvPr id="152" name="perf-47"/>
+          <p:cNvPr id="154" name="perf-47"/>
           <p:cNvSpPr/>
           <p:nvPr/>
         </p:nvSpPr>
@@ -1687,7 +1760,7 @@
       </p:sp>
       <p:sp>
         <p:nvSpPr>
-          <p:cNvPr id="153" name="perf-48"/>
+          <p:cNvPr id="155" name="perf-48"/>
           <p:cNvSpPr/>
           <p:nvPr/>
         </p:nvSpPr>
@@ -1713,7 +1786,7 @@
       </p:sp>
       <p:sp>
         <p:nvSpPr>
-          <p:cNvPr id="154" name="perf-49"/>
+          <p:cNvPr id="156" name="perf-49"/>
           <p:cNvSpPr/>
           <p:nvPr/>
         </p:nvSpPr>
@@ -1739,7 +1812,7 @@
       </p:sp>
       <p:sp>
         <p:nvSpPr>
-          <p:cNvPr id="155" name="perf-50"/>
+          <p:cNvPr id="157" name="perf-50"/>
           <p:cNvSpPr/>
           <p:nvPr/>
         </p:nvSpPr>
@@ -1765,7 +1838,7 @@
       </p:sp>
       <p:sp>
         <p:nvSpPr>
-          <p:cNvPr id="156" name="perf-51"/>
+          <p:cNvPr id="158" name="perf-51"/>
           <p:cNvSpPr/>
           <p:nvPr/>
         </p:nvSpPr>
@@ -1791,7 +1864,7 @@
       </p:sp>
       <p:sp>
         <p:nvSpPr>
-          <p:cNvPr id="157" name="perf-52"/>
+          <p:cNvPr id="159" name="perf-52"/>
           <p:cNvSpPr/>
           <p:nvPr/>
         </p:nvSpPr>
@@ -1817,7 +1890,7 @@
       </p:sp>
       <p:sp>
         <p:nvSpPr>
-          <p:cNvPr id="158" name="perf-53"/>
+          <p:cNvPr id="160" name="perf-53"/>
           <p:cNvSpPr/>
           <p:nvPr/>
         </p:nvSpPr>
@@ -1843,7 +1916,7 @@
       </p:sp>
       <p:sp>
         <p:nvSpPr>
-          <p:cNvPr id="159" name="perf-54"/>
+          <p:cNvPr id="161" name="perf-54"/>
           <p:cNvSpPr/>
           <p:nvPr/>
         </p:nvSpPr>
@@ -1869,7 +1942,7 @@
       </p:sp>
       <p:sp>
         <p:nvSpPr>
-          <p:cNvPr id="160" name="perf-55"/>
+          <p:cNvPr id="162" name="perf-55"/>
           <p:cNvSpPr/>
           <p:nvPr/>
         </p:nvSpPr>
@@ -1895,7 +1968,7 @@
       </p:sp>
       <p:sp>
         <p:nvSpPr>
-          <p:cNvPr id="161" name="perf-56"/>
+          <p:cNvPr id="163" name="perf-56"/>
           <p:cNvSpPr/>
           <p:nvPr/>
         </p:nvSpPr>
@@ -1921,7 +1994,7 @@
       </p:sp>
       <p:sp>
         <p:nvSpPr>
-          <p:cNvPr id="162" name="perf-57"/>
+          <p:cNvPr id="164" name="perf-57"/>
           <p:cNvSpPr/>
           <p:nvPr/>
         </p:nvSpPr>
@@ -1947,7 +2020,7 @@
       </p:sp>
       <p:sp>
         <p:nvSpPr>
-          <p:cNvPr id="163" name="perf-58"/>
+          <p:cNvPr id="165" name="perf-58"/>
           <p:cNvSpPr/>
           <p:nvPr/>
         </p:nvSpPr>
@@ -1973,7 +2046,7 @@
       </p:sp>
       <p:sp>
         <p:nvSpPr>
-          <p:cNvPr id="164" name="perf-59"/>
+          <p:cNvPr id="166" name="perf-59"/>
           <p:cNvSpPr/>
           <p:nvPr/>
         </p:nvSpPr>
@@ -2024,7 +2097,7 @@
       </p:grpSpPr>
       <p:sp>
         <p:nvSpPr>
-          <p:cNvPr id="165" name="readonly-only"/>
+          <p:cNvPr id="167" name="readonly-only"/>
           <p:cNvSpPr/>
           <p:nvPr/>
         </p:nvSpPr>
@@ -2067,7 +2140,7 @@
         <p:cBhvr>
           <p:cTn id="1" dur="500" fill="hold"/>
           <p:tgtEl>
-            <p:spTgt spid="165"/>
+            <p:spTgt spid="167"/>
           </p:tgtEl>
         </p:cBhvr>
         <p:to>
@@ -2098,7 +2171,7 @@
       </p:grpSpPr>
       <p:sp>
         <p:nvSpPr>
-          <p:cNvPr id="166" name="noncanonical-spin"/>
+          <p:cNvPr id="168" name="noncanonical-spin"/>
           <p:cNvSpPr/>
           <p:nvPr/>
         </p:nvSpPr>
@@ -2160,7 +2233,7 @@
                                 <p:cBhvr>
                                   <p:cTn id="101" dur="900" fill="hold"/>
                                   <p:tgtEl>
-                                    <p:spTgt spid="166"/>
+                                    <p:spTgt spid="168"/>
                                   </p:tgtEl>
                                   <p:attrNameLst>
                                     <p:attrName>r</p:attrName>

--- a/fixtures/sample-editor-animations.pptx
+++ b/fixtures/sample-editor-animations.pptx
@@ -2135,7 +2135,7 @@
     <a:masterClrMapping/>
   </p:clrMapOvr>
   <p:timing>
-    <p:tnLst>
+    <p:tnLst xmlns:fixture="urn:web-ppt:animation-fixture" fixture:keepList="yes">
       <p:animClr clrSpc="rgb">
         <p:cBhvr>
           <p:cTn id="1" dur="500" fill="hold"/>
